--- a/JD_gator_xuv590m.pptx
+++ b/JD_gator_xuv590m.pptx
@@ -6,6 +6,7 @@
   </p:sldMasterIdLst>
   <p:sldIdLst>
     <p:sldId id="256" r:id="rId2"/>
+    <p:sldId id="257" r:id="rId3"/>
   </p:sldIdLst>
   <p:sldSz cx="12192000" cy="6858000"/>
   <p:notesSz cx="6858000" cy="9144000"/>
@@ -258,7 +259,7 @@
           <a:lstStyle/>
           <a:p>
             <a:fld id="{97038524-70D1-384B-B10D-56671DEC9691}" type="datetimeFigureOut">
-              <a:t>11/25/22</a:t>
+              <a:t>6/15/24</a:t>
             </a:fld>
             <a:endParaRPr lang="en-US"/>
           </a:p>
@@ -454,7 +455,7 @@
           <a:lstStyle/>
           <a:p>
             <a:fld id="{97038524-70D1-384B-B10D-56671DEC9691}" type="datetimeFigureOut">
-              <a:t>11/25/22</a:t>
+              <a:t>6/15/24</a:t>
             </a:fld>
             <a:endParaRPr lang="en-US"/>
           </a:p>
@@ -660,7 +661,7 @@
           <a:lstStyle/>
           <a:p>
             <a:fld id="{97038524-70D1-384B-B10D-56671DEC9691}" type="datetimeFigureOut">
-              <a:t>11/25/22</a:t>
+              <a:t>6/15/24</a:t>
             </a:fld>
             <a:endParaRPr lang="en-US"/>
           </a:p>
@@ -856,7 +857,7 @@
           <a:lstStyle/>
           <a:p>
             <a:fld id="{97038524-70D1-384B-B10D-56671DEC9691}" type="datetimeFigureOut">
-              <a:t>11/25/22</a:t>
+              <a:t>6/15/24</a:t>
             </a:fld>
             <a:endParaRPr lang="en-US"/>
           </a:p>
@@ -1129,7 +1130,7 @@
           <a:lstStyle/>
           <a:p>
             <a:fld id="{97038524-70D1-384B-B10D-56671DEC9691}" type="datetimeFigureOut">
-              <a:t>11/25/22</a:t>
+              <a:t>6/15/24</a:t>
             </a:fld>
             <a:endParaRPr lang="en-US"/>
           </a:p>
@@ -1392,7 +1393,7 @@
           <a:lstStyle/>
           <a:p>
             <a:fld id="{97038524-70D1-384B-B10D-56671DEC9691}" type="datetimeFigureOut">
-              <a:t>11/25/22</a:t>
+              <a:t>6/15/24</a:t>
             </a:fld>
             <a:endParaRPr lang="en-US"/>
           </a:p>
@@ -1802,7 +1803,7 @@
           <a:lstStyle/>
           <a:p>
             <a:fld id="{97038524-70D1-384B-B10D-56671DEC9691}" type="datetimeFigureOut">
-              <a:t>11/25/22</a:t>
+              <a:t>6/15/24</a:t>
             </a:fld>
             <a:endParaRPr lang="en-US"/>
           </a:p>
@@ -1941,7 +1942,7 @@
           <a:lstStyle/>
           <a:p>
             <a:fld id="{97038524-70D1-384B-B10D-56671DEC9691}" type="datetimeFigureOut">
-              <a:t>11/25/22</a:t>
+              <a:t>6/15/24</a:t>
             </a:fld>
             <a:endParaRPr lang="en-US"/>
           </a:p>
@@ -2052,7 +2053,7 @@
           <a:lstStyle/>
           <a:p>
             <a:fld id="{97038524-70D1-384B-B10D-56671DEC9691}" type="datetimeFigureOut">
-              <a:t>11/25/22</a:t>
+              <a:t>6/15/24</a:t>
             </a:fld>
             <a:endParaRPr lang="en-US"/>
           </a:p>
@@ -2361,7 +2362,7 @@
           <a:lstStyle/>
           <a:p>
             <a:fld id="{97038524-70D1-384B-B10D-56671DEC9691}" type="datetimeFigureOut">
-              <a:t>11/25/22</a:t>
+              <a:t>6/15/24</a:t>
             </a:fld>
             <a:endParaRPr lang="en-US"/>
           </a:p>
@@ -2647,7 +2648,7 @@
           <a:lstStyle/>
           <a:p>
             <a:fld id="{97038524-70D1-384B-B10D-56671DEC9691}" type="datetimeFigureOut">
-              <a:t>11/25/22</a:t>
+              <a:t>6/15/24</a:t>
             </a:fld>
             <a:endParaRPr lang="en-US"/>
           </a:p>
@@ -2886,7 +2887,7 @@
           </a:lstStyle>
           <a:p>
             <a:fld id="{97038524-70D1-384B-B10D-56671DEC9691}" type="datetimeFigureOut">
-              <a:t>11/25/22</a:t>
+              <a:t>6/15/24</a:t>
             </a:fld>
             <a:endParaRPr lang="en-US"/>
           </a:p>
@@ -3688,7 +3689,7 @@
           <a:lstStyle/>
           <a:p>
             <a:r>
-              <a:rPr lang="en-US" sz="2800" b="1"/>
+              <a:rPr lang="en-US" sz="2800" b="1" dirty="0"/>
               <a:t>John Deere Gator UXV590M</a:t>
             </a:r>
           </a:p>
@@ -3778,6 +3779,478 @@
     <p:extLst>
       <p:ext uri="{BB962C8B-B14F-4D97-AF65-F5344CB8AC3E}">
         <p14:creationId xmlns:p14="http://schemas.microsoft.com/office/powerpoint/2010/main" val="3739756166"/>
+      </p:ext>
+    </p:extLst>
+  </p:cSld>
+  <p:clrMapOvr>
+    <a:masterClrMapping/>
+  </p:clrMapOvr>
+</p:sld>
+</file>
+
+<file path=ppt/slides/slide2.xml><?xml version="1.0" encoding="utf-8"?>
+<p:sld xmlns:a="http://schemas.openxmlformats.org/drawingml/2006/main" xmlns:r="http://schemas.openxmlformats.org/officeDocument/2006/relationships" xmlns:p="http://schemas.openxmlformats.org/presentationml/2006/main">
+  <p:cSld>
+    <p:spTree>
+      <p:nvGrpSpPr>
+        <p:cNvPr id="1" name=""/>
+        <p:cNvGrpSpPr/>
+        <p:nvPr/>
+      </p:nvGrpSpPr>
+      <p:grpSpPr>
+        <a:xfrm>
+          <a:off x="0" y="0"/>
+          <a:ext cx="0" cy="0"/>
+          <a:chOff x="0" y="0"/>
+          <a:chExt cx="0" cy="0"/>
+        </a:xfrm>
+      </p:grpSpPr>
+      <p:pic>
+        <p:nvPicPr>
+          <p:cNvPr id="2" name="Picture 1">
+            <a:extLst>
+              <a:ext uri="{FF2B5EF4-FFF2-40B4-BE49-F238E27FC236}">
+                <a16:creationId xmlns:a16="http://schemas.microsoft.com/office/drawing/2014/main" id="{C5DD7186-DFC2-0B9B-E733-E3CB80F09835}"/>
+              </a:ext>
+            </a:extLst>
+          </p:cNvPr>
+          <p:cNvPicPr>
+            <a:picLocks noChangeAspect="1"/>
+          </p:cNvPicPr>
+          <p:nvPr/>
+        </p:nvPicPr>
+        <p:blipFill>
+          <a:blip r:embed="rId2" cstate="email">
+            <a:extLst>
+              <a:ext uri="{28A0092B-C50C-407E-A947-70E740481C1C}">
+                <a14:useLocalDpi xmlns:a14="http://schemas.microsoft.com/office/drawing/2010/main"/>
+              </a:ext>
+            </a:extLst>
+          </a:blip>
+          <a:stretch>
+            <a:fillRect/>
+          </a:stretch>
+        </p:blipFill>
+        <p:spPr>
+          <a:xfrm>
+            <a:off x="106403" y="105156"/>
+            <a:ext cx="2903210" cy="2160528"/>
+          </a:xfrm>
+          <a:prstGeom prst="rect">
+            <a:avLst/>
+          </a:prstGeom>
+        </p:spPr>
+      </p:pic>
+      <p:sp>
+        <p:nvSpPr>
+          <p:cNvPr id="3" name="TextBox 2">
+            <a:extLst>
+              <a:ext uri="{FF2B5EF4-FFF2-40B4-BE49-F238E27FC236}">
+                <a16:creationId xmlns:a16="http://schemas.microsoft.com/office/drawing/2014/main" id="{B20D13A6-3947-210E-9290-7C959B052481}"/>
+              </a:ext>
+            </a:extLst>
+          </p:cNvPr>
+          <p:cNvSpPr txBox="1"/>
+          <p:nvPr/>
+        </p:nvSpPr>
+        <p:spPr>
+          <a:xfrm>
+            <a:off x="0" y="2312705"/>
+            <a:ext cx="3119821" cy="1015663"/>
+          </a:xfrm>
+          <a:prstGeom prst="rect">
+            <a:avLst/>
+          </a:prstGeom>
+          <a:noFill/>
+        </p:spPr>
+        <p:txBody>
+          <a:bodyPr wrap="square" rtlCol="0">
+            <a:spAutoFit/>
+          </a:bodyPr>
+          <a:lstStyle/>
+          <a:p>
+            <a:r>
+              <a:rPr lang="en-US" sz="1200" dirty="0"/>
+              <a:t>John Deere Cargo Box Side Extension Kit – Part # BM24901 (was Part # BM22774)</a:t>
+            </a:r>
+          </a:p>
+          <a:p>
+            <a:r>
+              <a:rPr lang="en-US" sz="1200" dirty="0">
+                <a:hlinkClick r:id="rId3"/>
+              </a:rPr>
+              <a:t>https://</a:t>
+            </a:r>
+            <a:r>
+              <a:rPr lang="en-US" sz="1200" dirty="0" err="1">
+                <a:hlinkClick r:id="rId3"/>
+              </a:rPr>
+              <a:t>www.greenpartstore.com</a:t>
+            </a:r>
+            <a:r>
+              <a:rPr lang="en-US" sz="1200" dirty="0">
+                <a:hlinkClick r:id="rId3"/>
+              </a:rPr>
+              <a:t>/John-Deere-Cargo-Box-Side-Extension-Kit-BM24901.html</a:t>
+            </a:r>
+            <a:endParaRPr lang="en-US" sz="1200" dirty="0"/>
+          </a:p>
+          <a:p>
+            <a:r>
+              <a:rPr lang="en-US" sz="1200" b="1" dirty="0">
+                <a:solidFill>
+                  <a:srgbClr val="FF0000"/>
+                </a:solidFill>
+              </a:rPr>
+              <a:t>$678</a:t>
+            </a:r>
+          </a:p>
+        </p:txBody>
+      </p:sp>
+      <p:sp>
+        <p:nvSpPr>
+          <p:cNvPr id="4" name="TextBox 3">
+            <a:extLst>
+              <a:ext uri="{FF2B5EF4-FFF2-40B4-BE49-F238E27FC236}">
+                <a16:creationId xmlns:a16="http://schemas.microsoft.com/office/drawing/2014/main" id="{395C1BAC-FBAB-8B0A-D6F9-1AFC43FC3D4A}"/>
+              </a:ext>
+            </a:extLst>
+          </p:cNvPr>
+          <p:cNvSpPr txBox="1"/>
+          <p:nvPr/>
+        </p:nvSpPr>
+        <p:spPr>
+          <a:xfrm>
+            <a:off x="4065840" y="2494490"/>
+            <a:ext cx="3552497" cy="830997"/>
+          </a:xfrm>
+          <a:prstGeom prst="rect">
+            <a:avLst/>
+          </a:prstGeom>
+          <a:noFill/>
+        </p:spPr>
+        <p:txBody>
+          <a:bodyPr wrap="square" rtlCol="0">
+            <a:spAutoFit/>
+          </a:bodyPr>
+          <a:lstStyle/>
+          <a:p>
+            <a:r>
+              <a:rPr lang="en-US" sz="1200" dirty="0"/>
+              <a:t>John Deere Cargo Box </a:t>
+            </a:r>
+            <a:r>
+              <a:rPr lang="en-US" sz="1200"/>
+              <a:t>Extension Kit - Part </a:t>
+            </a:r>
+            <a:r>
+              <a:rPr lang="en-US" sz="1200" dirty="0"/>
+              <a:t># BM23384</a:t>
+            </a:r>
+          </a:p>
+          <a:p>
+            <a:r>
+              <a:rPr lang="en-US" sz="1200" dirty="0">
+                <a:hlinkClick r:id="rId4"/>
+              </a:rPr>
+              <a:t>https://</a:t>
+            </a:r>
+            <a:r>
+              <a:rPr lang="en-US" sz="1200" dirty="0" err="1">
+                <a:hlinkClick r:id="rId4"/>
+              </a:rPr>
+              <a:t>www.greenpartstore.com</a:t>
+            </a:r>
+            <a:r>
+              <a:rPr lang="en-US" sz="1200" dirty="0">
+                <a:hlinkClick r:id="rId4"/>
+              </a:rPr>
+              <a:t>/John-Deere-Cargo-Box-Extension-Kit-BM23384.html</a:t>
+            </a:r>
+            <a:endParaRPr lang="en-US" sz="1200" dirty="0"/>
+          </a:p>
+          <a:p>
+            <a:r>
+              <a:rPr lang="en-US" sz="1200" b="1" dirty="0">
+                <a:solidFill>
+                  <a:srgbClr val="FF0000"/>
+                </a:solidFill>
+              </a:rPr>
+              <a:t>$475</a:t>
+            </a:r>
+          </a:p>
+        </p:txBody>
+      </p:sp>
+      <p:pic>
+        <p:nvPicPr>
+          <p:cNvPr id="5" name="Picture 4">
+            <a:extLst>
+              <a:ext uri="{FF2B5EF4-FFF2-40B4-BE49-F238E27FC236}">
+                <a16:creationId xmlns:a16="http://schemas.microsoft.com/office/drawing/2014/main" id="{0850291E-8A55-1BD6-4C7B-01A9453FF011}"/>
+              </a:ext>
+            </a:extLst>
+          </p:cNvPr>
+          <p:cNvPicPr>
+            <a:picLocks noChangeAspect="1"/>
+          </p:cNvPicPr>
+          <p:nvPr/>
+        </p:nvPicPr>
+        <p:blipFill>
+          <a:blip r:embed="rId5" cstate="email">
+            <a:extLst>
+              <a:ext uri="{28A0092B-C50C-407E-A947-70E740481C1C}">
+                <a14:useLocalDpi xmlns:a14="http://schemas.microsoft.com/office/drawing/2010/main"/>
+              </a:ext>
+            </a:extLst>
+          </a:blip>
+          <a:stretch>
+            <a:fillRect/>
+          </a:stretch>
+        </p:blipFill>
+        <p:spPr>
+          <a:xfrm>
+            <a:off x="4132405" y="203039"/>
+            <a:ext cx="2646767" cy="2238843"/>
+          </a:xfrm>
+          <a:prstGeom prst="rect">
+            <a:avLst/>
+          </a:prstGeom>
+        </p:spPr>
+      </p:pic>
+      <p:pic>
+        <p:nvPicPr>
+          <p:cNvPr id="1026" name="Picture 2" descr="LARGE SIDE EXTENSIONS">
+            <a:extLst>
+              <a:ext uri="{FF2B5EF4-FFF2-40B4-BE49-F238E27FC236}">
+                <a16:creationId xmlns:a16="http://schemas.microsoft.com/office/drawing/2014/main" id="{4DC759DA-0A03-0342-3873-E4E88A6AEDB5}"/>
+              </a:ext>
+            </a:extLst>
+          </p:cNvPr>
+          <p:cNvPicPr>
+            <a:picLocks noChangeAspect="1" noChangeArrowheads="1"/>
+          </p:cNvPicPr>
+          <p:nvPr/>
+        </p:nvPicPr>
+        <p:blipFill>
+          <a:blip r:embed="rId6" cstate="email">
+            <a:extLst>
+              <a:ext uri="{28A0092B-C50C-407E-A947-70E740481C1C}">
+                <a14:useLocalDpi xmlns:a14="http://schemas.microsoft.com/office/drawing/2010/main"/>
+              </a:ext>
+            </a:extLst>
+          </a:blip>
+          <a:srcRect/>
+          <a:stretch>
+            <a:fillRect/>
+          </a:stretch>
+        </p:blipFill>
+        <p:spPr bwMode="auto">
+          <a:xfrm>
+            <a:off x="8642161" y="241579"/>
+            <a:ext cx="3299945" cy="2200303"/>
+          </a:xfrm>
+          <a:prstGeom prst="rect">
+            <a:avLst/>
+          </a:prstGeom>
+          <a:noFill/>
+          <a:extLst>
+            <a:ext uri="{909E8E84-426E-40DD-AFC4-6F175D3DCCD1}">
+              <a14:hiddenFill xmlns:a14="http://schemas.microsoft.com/office/drawing/2010/main">
+                <a:solidFill>
+                  <a:srgbClr val="FFFFFF"/>
+                </a:solidFill>
+              </a14:hiddenFill>
+            </a:ext>
+          </a:extLst>
+        </p:spPr>
+      </p:pic>
+      <p:sp>
+        <p:nvSpPr>
+          <p:cNvPr id="6" name="TextBox 5">
+            <a:extLst>
+              <a:ext uri="{FF2B5EF4-FFF2-40B4-BE49-F238E27FC236}">
+                <a16:creationId xmlns:a16="http://schemas.microsoft.com/office/drawing/2014/main" id="{16A95309-ACF4-CD7B-7D53-10B561962B29}"/>
+              </a:ext>
+            </a:extLst>
+          </p:cNvPr>
+          <p:cNvSpPr txBox="1"/>
+          <p:nvPr/>
+        </p:nvSpPr>
+        <p:spPr>
+          <a:xfrm>
+            <a:off x="8639503" y="2494489"/>
+            <a:ext cx="3119821" cy="1015663"/>
+          </a:xfrm>
+          <a:prstGeom prst="rect">
+            <a:avLst/>
+          </a:prstGeom>
+          <a:noFill/>
+        </p:spPr>
+        <p:txBody>
+          <a:bodyPr wrap="square" rtlCol="0">
+            <a:spAutoFit/>
+          </a:bodyPr>
+          <a:lstStyle/>
+          <a:p>
+            <a:r>
+              <a:rPr lang="en-US" sz="1200" dirty="0"/>
+              <a:t>Large Side Extensions-Gator</a:t>
+            </a:r>
+          </a:p>
+          <a:p>
+            <a:r>
+              <a:rPr lang="en-US" sz="1200" dirty="0"/>
+              <a:t>WP001268</a:t>
+            </a:r>
+          </a:p>
+          <a:p>
+            <a:r>
+              <a:rPr lang="en-US" sz="1200" dirty="0">
+                <a:hlinkClick r:id="rId7"/>
+              </a:rPr>
+              <a:t>https://</a:t>
+            </a:r>
+            <a:r>
+              <a:rPr lang="en-US" sz="1200" dirty="0" err="1">
+                <a:hlinkClick r:id="rId7"/>
+              </a:rPr>
+              <a:t>www.hme.co.uk</a:t>
+            </a:r>
+            <a:r>
+              <a:rPr lang="en-US" sz="1200" dirty="0">
+                <a:hlinkClick r:id="rId7"/>
+              </a:rPr>
+              <a:t>/product/large-side-extensions/</a:t>
+            </a:r>
+            <a:endParaRPr lang="en-US" sz="1200" dirty="0"/>
+          </a:p>
+          <a:p>
+            <a:r>
+              <a:rPr lang="en-US" sz="1200" b="1" dirty="0">
+                <a:solidFill>
+                  <a:srgbClr val="FF0000"/>
+                </a:solidFill>
+              </a:rPr>
+              <a:t>£595</a:t>
+            </a:r>
+          </a:p>
+        </p:txBody>
+      </p:sp>
+      <p:pic>
+        <p:nvPicPr>
+          <p:cNvPr id="1028" name="Picture 4" descr="John Deere Gator Bed Extension">
+            <a:extLst>
+              <a:ext uri="{FF2B5EF4-FFF2-40B4-BE49-F238E27FC236}">
+                <a16:creationId xmlns:a16="http://schemas.microsoft.com/office/drawing/2014/main" id="{20EC6ECB-E5DD-1185-28EE-219E70084A79}"/>
+              </a:ext>
+            </a:extLst>
+          </p:cNvPr>
+          <p:cNvPicPr>
+            <a:picLocks noChangeAspect="1" noChangeArrowheads="1"/>
+          </p:cNvPicPr>
+          <p:nvPr/>
+        </p:nvPicPr>
+        <p:blipFill>
+          <a:blip r:embed="rId8">
+            <a:extLst>
+              <a:ext uri="{28A0092B-C50C-407E-A947-70E740481C1C}">
+                <a14:useLocalDpi xmlns:a14="http://schemas.microsoft.com/office/drawing/2010/main"/>
+              </a:ext>
+            </a:extLst>
+          </a:blip>
+          <a:srcRect/>
+          <a:stretch>
+            <a:fillRect/>
+          </a:stretch>
+        </p:blipFill>
+        <p:spPr bwMode="auto">
+          <a:xfrm>
+            <a:off x="141588" y="3766094"/>
+            <a:ext cx="2032000" cy="2032000"/>
+          </a:xfrm>
+          <a:prstGeom prst="rect">
+            <a:avLst/>
+          </a:prstGeom>
+          <a:noFill/>
+          <a:extLst>
+            <a:ext uri="{909E8E84-426E-40DD-AFC4-6F175D3DCCD1}">
+              <a14:hiddenFill xmlns:a14="http://schemas.microsoft.com/office/drawing/2010/main">
+                <a:solidFill>
+                  <a:srgbClr val="FFFFFF"/>
+                </a:solidFill>
+              </a14:hiddenFill>
+            </a:ext>
+          </a:extLst>
+        </p:spPr>
+      </p:pic>
+      <p:sp>
+        <p:nvSpPr>
+          <p:cNvPr id="7" name="TextBox 6">
+            <a:extLst>
+              <a:ext uri="{FF2B5EF4-FFF2-40B4-BE49-F238E27FC236}">
+                <a16:creationId xmlns:a16="http://schemas.microsoft.com/office/drawing/2014/main" id="{D35BE1B0-B365-D382-7A78-A157A6525533}"/>
+              </a:ext>
+            </a:extLst>
+          </p:cNvPr>
+          <p:cNvSpPr txBox="1"/>
+          <p:nvPr/>
+        </p:nvSpPr>
+        <p:spPr>
+          <a:xfrm>
+            <a:off x="0" y="5911249"/>
+            <a:ext cx="2832840" cy="646331"/>
+          </a:xfrm>
+          <a:prstGeom prst="rect">
+            <a:avLst/>
+          </a:prstGeom>
+          <a:noFill/>
+        </p:spPr>
+        <p:txBody>
+          <a:bodyPr wrap="square" rtlCol="0">
+            <a:spAutoFit/>
+          </a:bodyPr>
+          <a:lstStyle/>
+          <a:p>
+            <a:r>
+              <a:rPr lang="en-US" sz="1200" dirty="0"/>
+              <a:t>John Deere Gator Bed Extension - </a:t>
+            </a:r>
+            <a:r>
+              <a:rPr lang="en-US" sz="1200" b="1" dirty="0">
+                <a:solidFill>
+                  <a:srgbClr val="FF0000"/>
+                </a:solidFill>
+              </a:rPr>
+              <a:t>$699.00</a:t>
+            </a:r>
+          </a:p>
+          <a:p>
+            <a:r>
+              <a:rPr lang="en-US" sz="1200" dirty="0">
+                <a:hlinkClick r:id="rId9"/>
+              </a:rPr>
+              <a:t>https://</a:t>
+            </a:r>
+            <a:r>
+              <a:rPr lang="en-US" sz="1200" dirty="0" err="1">
+                <a:hlinkClick r:id="rId9"/>
+              </a:rPr>
+              <a:t>rancharmorutv.com</a:t>
+            </a:r>
+            <a:r>
+              <a:rPr lang="en-US" sz="1200" dirty="0">
+                <a:hlinkClick r:id="rId9"/>
+              </a:rPr>
+              <a:t>/john-deere-gator-bed-extension-rear-basket/</a:t>
+            </a:r>
+            <a:endParaRPr lang="en-US" sz="1200" dirty="0"/>
+          </a:p>
+        </p:txBody>
+      </p:sp>
+    </p:spTree>
+    <p:extLst>
+      <p:ext uri="{BB962C8B-B14F-4D97-AF65-F5344CB8AC3E}">
+        <p14:creationId xmlns:p14="http://schemas.microsoft.com/office/powerpoint/2010/main" val="2567009584"/>
       </p:ext>
     </p:extLst>
   </p:cSld>
